--- a/curso/pptx/S25.pptx
+++ b/curso/pptx/S25.pptx
@@ -7015,7 +7015,7 @@
                 </a:solidFill>
                 <a:latin typeface="Nunito Sans"/>
               </a:rPr>
-              <a:t>Por poder:</a:t>
+              <a:t>凭权力：</a:t>
             </a:r>
             <a:r>
               <a:rPr sz="2800" b="0">
@@ -7024,7 +7024,7 @@
                 </a:solidFill>
                 <a:latin typeface="Nunito Sans"/>
               </a:rPr>
-              <a:t> puede mandar, porque tiene un cargo</a:t>
+              <a:t>可以下命令，因为他有职位</a:t>
             </a:r>
           </a:p>
           <a:p>
@@ -7049,7 +7049,7 @@
                 </a:solidFill>
                 <a:latin typeface="Nunito Sans"/>
               </a:rPr>
-              <a:t>Por saber:</a:t>
+              <a:t>凭知识：</a:t>
             </a:r>
             <a:r>
               <a:rPr sz="2800" b="0">
@@ -7058,7 +7058,7 @@
                 </a:solidFill>
                 <a:latin typeface="Nunito Sans"/>
               </a:rPr>
-              <a:t> sabe mucho de un tema</a:t>
+              <a:t>对某个话题懂得很多</a:t>
             </a:r>
           </a:p>
           <a:p>
@@ -7083,7 +7083,7 @@
                 </a:solidFill>
                 <a:latin typeface="Nunito Sans"/>
               </a:rPr>
-              <a:t>Una misma persona puede tener las dos</a:t>
+              <a:t>同一个人可以两者兼有</a:t>
             </a:r>
           </a:p>
         </p:txBody>
@@ -7706,7 +7706,7 @@
                 </a:solidFill>
                 <a:latin typeface="Nunito Sans"/>
               </a:rPr>
-              <a:t>El árbitro manda en el partido, pero puede equivocarse</a:t>
+              <a:t>裁判在比赛里说了算，但他也可能判错</a:t>
             </a:r>
           </a:p>
           <a:p>
@@ -7731,7 +7731,7 @@
                 </a:solidFill>
                 <a:latin typeface="Nunito Sans"/>
               </a:rPr>
-              <a:t>Obedecer no significa que quien manda tenga razón</a:t>
+              <a:t>服从不等于发号施令的人是对的</a:t>
             </a:r>
           </a:p>
           <a:p>
@@ -7756,7 +7756,7 @@
                 </a:solidFill>
                 <a:latin typeface="Nunito Sans"/>
               </a:rPr>
-              <a:t>Nadie sabe de todo por ser jefe</a:t>
+              <a:t>没有人因为当了领导就什么都懂</a:t>
             </a:r>
           </a:p>
           <a:p>
@@ -7781,7 +7781,7 @@
                 </a:solidFill>
                 <a:latin typeface="Nunito Sans"/>
               </a:rPr>
-              <a:t>Por su saber, un experto no puede mandarte: solo darte razones</a:t>
+              <a:t>凭知识，专家不能命令你：只能给你理由</a:t>
             </a:r>
           </a:p>
         </p:txBody>

--- a/curso/pptx/S25.pptx
+++ b/curso/pptx/S25.pptx
@@ -4437,7 +4437,7 @@
                 </a:solidFill>
                 <a:latin typeface="Nunito Sans"/>
               </a:rPr>
-              <a:t>Naiara 把自行车送到修车铺。修理工告诉她链条磨损了，需要换。</a:t>
+              <a:t>一个女孩把自行车送到修车铺。修理工告诉她链条磨损了，需要换。</a:t>
             </a:r>
           </a:p>
         </p:txBody>
@@ -4510,7 +4510,7 @@
                 </a:solidFill>
                 <a:latin typeface="Nunito Sans"/>
               </a:rPr>
-              <a:t>她能强迫 Naiara 吗？不能：她管不着 Naiara。</a:t>
+              <a:t>她能强迫这个女孩吗？不能：她管不着这个女孩。</a:t>
             </a:r>
           </a:p>
           <a:p>
@@ -4535,7 +4535,7 @@
                 </a:solidFill>
                 <a:latin typeface="Nunito Sans"/>
               </a:rPr>
-              <a:t>为什么要相信她？因为她懂这方面，而且能把磨损的链条给 Naiara 看。</a:t>
+              <a:t>为什么要相信她？因为她懂这方面，而且能把磨损的链条给这个女孩看。</a:t>
             </a:r>
           </a:p>
           <a:p>
@@ -5055,7 +5055,7 @@
                 </a:solidFill>
                 <a:latin typeface="Nunito Sans"/>
               </a:rPr>
-              <a:t>在海滩上，救生员吹着哨子喊：“快出水，有暗流！”Iker：“他只是有权力。有权力不等于有道理。”</a:t>
+              <a:t>在海滩上，救生员吹着哨子喊：“快出水，有暗流！”一个男孩：“他只是有权力。有权力不等于有道理。”</a:t>
             </a:r>
           </a:p>
         </p:txBody>
